--- a/docs/presentation/KubeEdgeInfer-CodeDemo.pptx
+++ b/docs/presentation/KubeEdgeInfer-CodeDemo.pptx
@@ -1420,7 +1420,7 @@
                 <a:ea typeface="Cambria" pitchFamily="34" charset="-122"/>
                 <a:cs typeface="Cambria" pitchFamily="34" charset="-120"/>
               </a:rPr>
-              <a:t>Proposed Work: Code Walkthrough</a:t>
+              <a:t>A Walk Through the Code</a:t>
             </a:r>
             <a:endParaRPr lang="en-US" sz="4000" dirty="0"/>
           </a:p>
@@ -1462,7 +1462,7 @@
                 <a:ea typeface="Calibri" pitchFamily="34" charset="-122"/>
                 <a:cs typeface="Calibri" pitchFamily="34" charset="-120"/>
               </a:rPr>
-              <a:t>The four loop stages in source, and the commands that make the cluster heal itself on stage.</a:t>
+              <a:t>The four stages of the loop in real code, and the commands that make the machines fix themselves on stage.</a:t>
             </a:r>
             <a:endParaRPr lang="en-US" sz="1400" dirty="0"/>
           </a:p>
@@ -1765,7 +1765,7 @@
                 <a:ea typeface="Calibri" pitchFamily="34" charset="-122"/>
                 <a:cs typeface="Calibri" pitchFamily="34" charset="-120"/>
               </a:rPr>
-              <a:t>Kept separate from the main deck - present only if there is time for the demo.</a:t>
+              <a:t>Kept separate from the main deck. Show this only if there is time for the demo.</a:t>
             </a:r>
             <a:endParaRPr lang="en-US" sz="1050" dirty="0"/>
           </a:p>
@@ -1875,7 +1875,7 @@
                 <a:ea typeface="Cambria" pitchFamily="34" charset="-122"/>
                 <a:cs typeface="Cambria" pitchFamily="34" charset="-120"/>
               </a:rPr>
-              <a:t>Where each loop stage lives</a:t>
+              <a:t>Where each part of the loop lives</a:t>
             </a:r>
             <a:endParaRPr lang="en-US" sz="3000" dirty="0"/>
           </a:p>
@@ -2083,7 +2083,7 @@
                 <a:ea typeface="Calibri" pitchFamily="34" charset="-122"/>
                 <a:cs typeface="Calibri" pitchFamily="34" charset="-120"/>
               </a:rPr>
-              <a:t>Per-flow smoothed RTT and byte counts</a:t>
+              <a:t>Measures delay and speed of every connection</a:t>
             </a:r>
             <a:endParaRPr lang="en-US" sz="1000" dirty="0"/>
           </a:p>
@@ -2266,7 +2266,7 @@
                 <a:ea typeface="Calibri" pitchFamily="34" charset="-122"/>
                 <a:cs typeface="Calibri" pitchFamily="34" charset="-120"/>
               </a:rPr>
-              <a:t>Loads the BPF object, merges GPU state, serves telemetry</a:t>
+              <a:t>Loads the kernel programs, adds GPU state, reports it all</a:t>
             </a:r>
             <a:endParaRPr lang="en-US" sz="1000" dirty="0"/>
           </a:p>
@@ -2474,7 +2474,7 @@
                 <a:ea typeface="Calibri" pitchFamily="34" charset="-122"/>
                 <a:cs typeface="Calibri" pitchFamily="34" charset="-120"/>
               </a:rPr>
-              <a:t>Linear-partition DP, Evaluate, and the hysteresis Decider</a:t>
+              <a:t>Works out the best cut, and decides when to apply it</a:t>
             </a:r>
             <a:endParaRPr lang="en-US" sz="1000" dirty="0"/>
           </a:p>
@@ -2657,7 +2657,7 @@
                 <a:ea typeface="Calibri" pitchFamily="34" charset="-122"/>
                 <a:cs typeface="Calibri" pitchFamily="34" charset="-120"/>
               </a:rPr>
-              <a:t>Aggregates telemetry, writes the CRD, pushes assignments</a:t>
+              <a:t>Collects the readings, saves the plan, sends it out</a:t>
             </a:r>
             <a:endParaRPr lang="en-US" sz="1000" dirty="0"/>
           </a:p>
@@ -2865,7 +2865,7 @@
                 <a:ea typeface="Calibri" pitchFamily="34" charset="-122"/>
                 <a:cs typeface="Calibri" pitchFamily="34" charset="-120"/>
               </a:rPr>
-              <a:t>3 s heartbeat watchdog forcing repartition across survivors</a:t>
+              <a:t>Notices a dead machine in 3 seconds and forces a re-cut</a:t>
             </a:r>
             <a:endParaRPr lang="en-US" sz="1000" dirty="0"/>
           </a:p>
@@ -3048,7 +3048,7 @@
                 <a:ea typeface="Calibri" pitchFamily="34" charset="-122"/>
                 <a:cs typeface="Calibri" pitchFamily="34" charset="-120"/>
               </a:rPr>
-              <a:t>Stateless shard workers (sim, gpt2) and the router</a:t>
+              <a:t>Machines that hold layers but no state, plus the router</a:t>
             </a:r>
             <a:endParaRPr lang="en-US" sz="1000" dirty="0"/>
           </a:p>
@@ -3256,7 +3256,7 @@
                 <a:ea typeface="Calibri" pitchFamily="34" charset="-122"/>
                 <a:cs typeface="Calibri" pitchFamily="34" charset="-120"/>
               </a:rPr>
-              <a:t>Cluster ablation harness and partitioner-level evaluation</a:t>
+              <a:t>The tests: full cluster runs, and solver-only runs</a:t>
             </a:r>
             <a:endParaRPr lang="en-US" sz="1000" dirty="0"/>
           </a:p>
@@ -3295,7 +3295,7 @@
                 <a:ea typeface="Calibri" pitchFamily="34" charset="-122"/>
                 <a:cs typeface="Calibri" pitchFamily="34" charset="-120"/>
               </a:rPr>
-              <a:t>Generated gRPC stubs and the compiled BPF object are committed, so a demo needs neither protoc nor clang.</a:t>
+              <a:t>The generated network code and the compiled kernel program are already in the repo, so a demo needs no extra build tools.</a:t>
             </a:r>
             <a:endParaRPr lang="en-US" sz="950" dirty="0"/>
           </a:p>
@@ -3444,7 +3444,7 @@
                 <a:ea typeface="Cambria" pitchFamily="34" charset="-122"/>
                 <a:cs typeface="Cambria" pitchFamily="34" charset="-120"/>
               </a:rPr>
-              <a:t>Measuring latency inside the kernel</a:t>
+              <a:t>Measuring network delay inside the kernel</a:t>
             </a:r>
             <a:endParaRPr lang="en-US" sz="3000" dirty="0"/>
           </a:p>
@@ -4117,7 +4117,7 @@
                 <a:ea typeface="Calibri" pitchFamily="34" charset="-122"/>
                 <a:cs typeface="Calibri" pitchFamily="34" charset="-120"/>
               </a:rPr>
-              <a:t>Why the kernel's own number</a:t>
+              <a:t>Why we use the kernel's own number</a:t>
             </a:r>
             <a:endParaRPr lang="en-US" sz="1200" dirty="0"/>
           </a:p>
@@ -4159,7 +4159,7 @@
                 <a:ea typeface="Calibri" pitchFamily="34" charset="-122"/>
                 <a:cs typeface="Calibri" pitchFamily="34" charset="-120"/>
               </a:rPr>
-              <a:t>srtt_us is the smoothed RTT the TCP stack already maintains for congestion control. Reading it costs nothing, and it cannot disagree with reality the way an application-level timer can.</a:t>
+              <a:t>Linux already tracks the round-trip time of every connection, because it needs it to manage traffic. Reading that number costs nothing, and it cannot be wrong the way a timer inside the program can.</a:t>
             </a:r>
             <a:endParaRPr lang="en-US" sz="1000" dirty="0"/>
           </a:p>
@@ -4250,7 +4250,7 @@
                 <a:ea typeface="Calibri" pitchFamily="34" charset="-122"/>
                 <a:cs typeface="Calibri" pitchFamily="34" charset="-120"/>
               </a:rPr>
-              <a:t>CO-RE, not a rebuild</a:t>
+              <a:t>Build once, run anywhere</a:t>
             </a:r>
             <a:endParaRPr lang="en-US" sz="1200" dirty="0"/>
           </a:p>
@@ -4292,7 +4292,7 @@
                 <a:ea typeface="Calibri" pitchFamily="34" charset="-122"/>
                 <a:cs typeface="Calibri" pitchFamily="34" charset="-120"/>
               </a:rPr>
-              <a:t>BPF_CORE_READ relocates struct offsets against the host BTF at load time, so one committed object file loads on any kernel with /sys/kernel/btf/vmlinux.</a:t>
+              <a:t>The program adjusts itself to the running kernel when it is loaded. So one compiled file works on any modern Linux kernel, with no rebuilding.</a:t>
             </a:r>
             <a:endParaRPr lang="en-US" sz="1000" dirty="0"/>
           </a:p>
@@ -4383,7 +4383,7 @@
                 <a:ea typeface="Calibri" pitchFamily="34" charset="-122"/>
                 <a:cs typeface="Calibri" pitchFamily="34" charset="-120"/>
               </a:rPr>
-              <a:t>Scoped, not global</a:t>
+              <a:t>We only watch what we need</a:t>
             </a:r>
             <a:endParaRPr lang="en-US" sz="1200" dirty="0"/>
           </a:p>
@@ -4425,7 +4425,7 @@
                 <a:ea typeface="Calibri" pitchFamily="34" charset="-122"/>
                 <a:cs typeface="Calibri" pitchFamily="34" charset="-120"/>
               </a:rPr>
-              <a:t>Flows are filtered to worker ports; the controller attributes each flow to a pod by source IP.</a:t>
+              <a:t>We only look at connections between our own machines. The controller then matches each connection to the machine it came from.</a:t>
             </a:r>
             <a:endParaRPr lang="en-US" sz="1000" dirty="0"/>
           </a:p>
@@ -4464,7 +4464,7 @@
                 <a:ea typeface="Calibri" pitchFamily="34" charset="-122"/>
                 <a:cs typeface="Calibri" pitchFamily="34" charset="-120"/>
               </a:rPr>
-              <a:t>Demo: kubectl -n kubeedgeinfer logs -l app=keinfer-nodeagent</a:t>
+              <a:t>Demo: show the live readings with kubectl logs</a:t>
             </a:r>
             <a:endParaRPr lang="en-US" sz="950" dirty="0"/>
           </a:p>
@@ -4613,7 +4613,7 @@
                 <a:ea typeface="Cambria" pitchFamily="34" charset="-122"/>
                 <a:cs typeface="Cambria" pitchFamily="34" charset="-120"/>
               </a:rPr>
-              <a:t>The exact partitioner</a:t>
+              <a:t>The solver that picks the cut</a:t>
             </a:r>
             <a:endParaRPr lang="en-US" sz="3000" dirty="0"/>
           </a:p>
@@ -5390,7 +5390,7 @@
                 <a:ea typeface="Calibri" pitchFamily="34" charset="-122"/>
                 <a:cs typeface="Calibri" pitchFamily="34" charset="-120"/>
               </a:rPr>
-              <a:t>Minimal achievable bottleneck when the first j layers are spread over the first w workers. The answer is f[N][K]; choice[][] reconstructs the ranges.</a:t>
+              <a:t>The best we can do for the first j layers on the first w machines. The final answer is f[N][K], and choice[][] tells us where the cuts go.</a:t>
             </a:r>
             <a:endParaRPr lang="en-US" sz="1000" dirty="0"/>
           </a:p>
@@ -5481,7 +5481,7 @@
                 <a:ea typeface="Calibri" pitchFamily="34" charset="-122"/>
                 <a:cs typeface="Calibri" pitchFamily="34" charset="-120"/>
               </a:rPr>
-              <a:t>Speed carries the throttle</a:t>
+              <a:t>Heat is just a slower speed</a:t>
             </a:r>
             <a:endParaRPr lang="en-US" sz="1200" dirty="0"/>
           </a:p>
@@ -5523,7 +5523,7 @@
                 <a:ea typeface="Calibri" pitchFamily="34" charset="-122"/>
                 <a:cs typeface="Calibri" pitchFamily="34" charset="-120"/>
               </a:rPr>
-              <a:t>Worker.Speed is an effective multiplier in (0,1]. Thermal derating enters here, so the solver contains no separate thermal branch anywhere.</a:t>
+              <a:t>Each machine has one Speed number. When it gets hot, that number drops. So the solver has no special code for heat anywhere - it just sees a slower machine.</a:t>
             </a:r>
             <a:endParaRPr lang="en-US" sz="1000" dirty="0"/>
           </a:p>
@@ -5614,7 +5614,7 @@
                 <a:ea typeface="Calibri" pitchFamily="34" charset="-122"/>
                 <a:cs typeface="Calibri" pitchFamily="34" charset="-120"/>
               </a:rPr>
-              <a:t>Zero-layer stages are legal</a:t>
+              <a:t>A machine can get zero layers</a:t>
             </a:r>
             <a:endParaRPr lang="en-US" sz="1200" dirty="0"/>
           </a:p>
@@ -5656,7 +5656,7 @@
                 <a:ea typeface="Calibri" pitchFamily="34" charset="-122"/>
                 <a:cs typeface="Calibri" pitchFamily="34" charset="-120"/>
               </a:rPr>
-              <a:t>That one `if layers == 0` is what lets the DP bypass a badly connected node - exclusion falls out of the objective.</a:t>
+              <a:t>That one line is what lets the solver skip a machine with a bad network. Nobody wrote a rule for skipping - it falls out of the maths.</a:t>
             </a:r>
             <a:endParaRPr lang="en-US" sz="1000" dirty="0"/>
           </a:p>
@@ -5695,7 +5695,7 @@
                 <a:ea typeface="Calibri" pitchFamily="34" charset="-122"/>
                 <a:cs typeface="Calibri" pitchFamily="34" charset="-120"/>
               </a:rPr>
-              <a:t>Demo: go test ./internal/partition/... - includes a brute-force cross-check on 200 randomised instances.</a:t>
+              <a:t>Demo: go test ./internal/partition/... - it checks the solver against brute force on 200 random cases.</a:t>
             </a:r>
             <a:endParaRPr lang="en-US" sz="950" dirty="0"/>
           </a:p>
@@ -5844,7 +5844,7 @@
                 <a:ea typeface="Cambria" pitchFamily="34" charset="-122"/>
                 <a:cs typeface="Cambria" pitchFamily="34" charset="-120"/>
               </a:rPr>
-              <a:t>From decision to a running pipeline</a:t>
+              <a:t>From a decision to a running system</a:t>
             </a:r>
             <a:endParaRPr lang="en-US" sz="3000" dirty="0"/>
           </a:p>
@@ -6312,7 +6312,7 @@
                 <a:ea typeface="Courier New" pitchFamily="34" charset="-122"/>
                 <a:cs typeface="Courier New" pitchFamily="34" charset="-120"/>
               </a:rPr>
-              <a:t>demo - inject and clear a thermal fault</a:t>
+              <a:t>demo - make a machine hot, then cool it again</a:t>
             </a:r>
             <a:endParaRPr lang="en-US" sz="850" dirty="0"/>
           </a:p>
@@ -6505,7 +6505,7 @@
                 <a:ea typeface="Calibri" pitchFamily="34" charset="-122"/>
                 <a:cs typeface="Calibri" pitchFamily="34" charset="-120"/>
               </a:rPr>
-              <a:t>Three exits, one function</a:t>
+              <a:t>Three ways out, one function</a:t>
             </a:r>
             <a:endParaRPr lang="en-US" sz="1200" dirty="0"/>
           </a:p>
@@ -6547,7 +6547,7 @@
                 <a:ea typeface="Calibri" pitchFamily="34" charset="-122"/>
                 <a:cs typeface="Calibri" pitchFamily="34" charset="-120"/>
               </a:rPr>
-              <a:t>A membership change heals immediately; a large enough improvement past the cooldown repartitions; everything else keeps the current split and merely refreshes its cost.</a:t>
+              <a:t>If a machine appears or dies, re-cut at once. If a new cut is clearly better and enough time has passed, apply it. Otherwise keep the current cut and just update its cost.</a:t>
             </a:r>
             <a:endParaRPr lang="en-US" sz="1000" dirty="0"/>
           </a:p>
@@ -6638,7 +6638,7 @@
                 <a:ea typeface="Calibri" pitchFamily="34" charset="-122"/>
                 <a:cs typeface="Calibri" pitchFamily="34" charset="-120"/>
               </a:rPr>
-              <a:t>Evaluate is the honest comparison</a:t>
+              <a:t>We compare fairly</a:t>
             </a:r>
             <a:endParaRPr lang="en-US" sz="1200" dirty="0"/>
           </a:p>
@@ -6680,7 +6680,7 @@
                 <a:ea typeface="Calibri" pitchFamily="34" charset="-122"/>
                 <a:cs typeface="Calibri" pitchFamily="34" charset="-120"/>
               </a:rPr>
-              <a:t>The incumbent split is re-scored under current telemetry before comparison - otherwise the threshold would measure against a stale number.</a:t>
+              <a:t>Before comparing, we re-score the cut we are already using with today's readings. Otherwise we would be comparing against an old number.</a:t>
             </a:r>
             <a:endParaRPr lang="en-US" sz="1000" dirty="0"/>
           </a:p>
@@ -6771,7 +6771,7 @@
                 <a:ea typeface="Calibri" pitchFamily="34" charset="-122"/>
                 <a:cs typeface="Calibri" pitchFamily="34" charset="-120"/>
               </a:rPr>
-              <a:t>Applying without a restart</a:t>
+              <a:t>Changing the cut with no restart</a:t>
             </a:r>
             <a:endParaRPr lang="en-US" sz="1200" dirty="0"/>
           </a:p>
@@ -6813,7 +6813,7 @@
                 <a:ea typeface="Calibri" pitchFamily="34" charset="-122"/>
                 <a:cs typeface="Calibri" pitchFamily="34" charset="-120"/>
               </a:rPr>
-              <a:t>The controller writes the new ranges into the InferencePipeline CRD and pushes them over gRPC with a bumped generation. Workers reject stale-generation forwards; the router refetches the layout and replays the accumulated context. Workers hold no state, so replay is trivially correct.</a:t>
+              <a:t>The controller saves the new layer ranges in Kubernetes and sends them to the machines with a new version number. Machines refuse messages from an old version. The router then fetches the new plan and replays the request from the start. Machines keep no state, so replaying is always safe.</a:t>
             </a:r>
             <a:endParaRPr lang="en-US" sz="1000" dirty="0"/>
           </a:p>
@@ -6852,7 +6852,7 @@
                 <a:ea typeface="Calibri" pitchFamily="34" charset="-122"/>
                 <a:cs typeface="Calibri" pitchFamily="34" charset="-120"/>
               </a:rPr>
-              <a:t>Layers migrate off the hot node within roughly 35 s and return once it cools.</a:t>
+              <a:t>Layers move off the hot machine in about 35 seconds, and come back once it cools down.</a:t>
             </a:r>
             <a:endParaRPr lang="en-US" sz="950" dirty="0"/>
           </a:p>
@@ -7104,7 +7104,7 @@
                 <a:ea typeface="Calibri" pitchFamily="34" charset="-122"/>
                 <a:cs typeface="Calibri" pitchFamily="34" charset="-120"/>
               </a:rPr>
-              <a:t>One command</a:t>
+              <a:t>One command starts everything</a:t>
             </a:r>
             <a:endParaRPr lang="en-US" sz="1200" dirty="0"/>
           </a:p>
@@ -7215,7 +7215,7 @@
                 <a:ea typeface="Calibri" pitchFamily="34" charset="-122"/>
                 <a:cs typeface="Calibri" pitchFamily="34" charset="-120"/>
               </a:rPr>
-              <a:t>Builds images, creates the kind cluster, deploys everything and opens a live dashboard on localhost:8000 with the pipeline, per-stage utilisation, eBPF flow sRTTs and a repartition event log.</a:t>
+              <a:t>Builds everything, starts the cluster, and opens a live dashboard on localhost:8000 showing the machines, how busy each one is, the network delays, and a log of every re-cut.</a:t>
             </a:r>
             <a:endParaRPr lang="en-US" sz="900" dirty="0"/>
           </a:p>
@@ -7318,7 +7318,7 @@
                 <a:ea typeface="Calibri" pitchFamily="34" charset="-122"/>
                 <a:cs typeface="Calibri" pitchFamily="34" charset="-120"/>
               </a:rPr>
-              <a:t>Watch the CRD</a:t>
+              <a:t>Watch the plan change</a:t>
             </a:r>
             <a:endParaRPr lang="en-US" sz="1200" dirty="0"/>
           </a:p>
@@ -7429,7 +7429,7 @@
                 <a:ea typeface="Calibri" pitchFamily="34" charset="-122"/>
                 <a:cs typeface="Calibri" pitchFamily="34" charset="-120"/>
               </a:rPr>
-              <a:t>Assignments and generation update in place as the controller re-plans.</a:t>
+              <a:t>The layer ranges and the version number update as the controller re-plans.</a:t>
             </a:r>
             <a:endParaRPr lang="en-US" sz="900" dirty="0"/>
           </a:p>
@@ -7532,7 +7532,7 @@
                 <a:ea typeface="Calibri" pitchFamily="34" charset="-122"/>
                 <a:cs typeface="Calibri" pitchFamily="34" charset="-120"/>
               </a:rPr>
-              <a:t>Drive load</a:t>
+              <a:t>Send it some work</a:t>
             </a:r>
             <a:endParaRPr lang="en-US" sz="1200" dirty="0"/>
           </a:p>
@@ -7683,7 +7683,7 @@
                 <a:ea typeface="Calibri" pitchFamily="34" charset="-122"/>
                 <a:cs typeface="Calibri" pitchFamily="34" charset="-120"/>
               </a:rPr>
-              <a:t>Requests flow hub-and-spoke through the router across the stages.</a:t>
+              <a:t>The router sends each request through the machines in order.</a:t>
             </a:r>
             <a:endParaRPr lang="en-US" sz="900" dirty="0"/>
           </a:p>
@@ -7786,7 +7786,7 @@
                 <a:ea typeface="Calibri" pitchFamily="34" charset="-122"/>
                 <a:cs typeface="Calibri" pitchFamily="34" charset="-120"/>
               </a:rPr>
-              <a:t>Inject a fault</a:t>
+              <a:t>Break something on purpose</a:t>
             </a:r>
             <a:endParaRPr lang="en-US" sz="1200" dirty="0"/>
           </a:p>
@@ -7917,7 +7917,7 @@
                 <a:ea typeface="Calibri" pitchFamily="34" charset="-122"/>
                 <a:cs typeface="Calibri" pitchFamily="34" charset="-120"/>
               </a:rPr>
-              <a:t>Or use the dashboard buttons. Layers migrate off the hot node, then return after it cools.</a:t>
+              <a:t>Or press the buttons on the dashboard. Layers move off the hot machine, then come back once it cools.</a:t>
             </a:r>
             <a:endParaRPr lang="en-US" sz="900" dirty="0"/>
           </a:p>
@@ -8020,7 +8020,7 @@
                 <a:ea typeface="Calibri" pitchFamily="34" charset="-122"/>
                 <a:cs typeface="Calibri" pitchFamily="34" charset="-120"/>
               </a:rPr>
-              <a:t>Reproduce results</a:t>
+              <a:t>Reproduce the numbers</a:t>
             </a:r>
             <a:endParaRPr lang="en-US" sz="1200" dirty="0"/>
           </a:p>
@@ -8151,7 +8151,7 @@
                 <a:ea typeface="Calibri" pitchFamily="34" charset="-122"/>
                 <a:cs typeface="Calibri" pitchFamily="34" charset="-120"/>
               </a:rPr>
-              <a:t>dpsim reproduces the slide-11 numbers with no cluster at all; bench/run.py needs the live cluster and produces tokens/s, TTFT and bubble time.</a:t>
+              <a:t>dpsim reproduces the numbers on slide 11 with no cluster at all. bench/run.py needs the running cluster and measures words per second and idle time.</a:t>
             </a:r>
             <a:endParaRPr lang="en-US" sz="900" dirty="0"/>
           </a:p>
@@ -8190,7 +8190,7 @@
                 <a:ea typeface="Calibri" pitchFamily="34" charset="-122"/>
                 <a:cs typeface="Calibri" pitchFamily="34" charset="-120"/>
               </a:rPr>
-              <a:t>Requirements: Linux with BTF at /sys/kernel/btf/vmlinux, Docker, kind, kubectl, Python 3.11+.</a:t>
+              <a:t>You need: a modern Linux kernel, Docker, kind, kubectl and Python 3.11 or newer.</a:t>
             </a:r>
             <a:endParaRPr lang="en-US" sz="950" dirty="0"/>
           </a:p>
